--- a/alumnos/soluciones/ej12_grafico_pptx/ficheros/ventas.pptx
+++ b/alumnos/soluciones/ej12_grafico_pptx/ficheros/ventas.pptx
@@ -9,7 +9,7 @@
     <p:sldId id="257" r:id="rId8"/>
     <p:sldId id="258" r:id="rId9"/>
   </p:sldIdLst>
-  <p:sldSz cx="9144000" cy="6858000" type="screen4x3"/>
+  <p:sldSz cx="12193200" cy="6858000" type="screen4x3"/>
   <p:notesSz cx="6858000" cy="9144000"/>
   <p:defaultTextStyle>
     <a:defPPr>
@@ -3127,7 +3127,7 @@
           <a:lstStyle/>
           <a:p>
             <a:r>
-              <a:t>Enero – Junio · Hogar, Textil y Bazar</a:t>
+              <a:t>Enero – Junio · Resumen por categorías</a:t>
             </a:r>
           </a:p>
         </p:txBody>
@@ -3187,8 +3187,8 @@
         </p:blipFill>
         <p:spPr>
           <a:xfrm>
-            <a:off x="1371600" y="1280160"/>
-            <a:ext cx="6400800" cy="3556000"/>
+            <a:off x="1524599" y="1152000"/>
+            <a:ext cx="9144000" cy="5080000"/>
           </a:xfrm>
           <a:prstGeom prst="rect">
             <a:avLst/>
@@ -3243,8 +3243,8 @@
           <p:nvPr/>
         </p:nvGraphicFramePr>
         <p:xfrm>
-          <a:off x="2286000" y="1463040"/>
-          <a:ext cx="4572000" cy="3657600"/>
+          <a:off x="4140000" y="1620000"/>
+          <a:ext cx="3960000" cy="2700000"/>
         </p:xfrm>
         <a:graphic>
           <a:graphicData uri="http://schemas.openxmlformats.org/drawingml/2006/table">
@@ -3253,15 +3253,18 @@
                 <a:tableStyleId>{5C22544A-7EE6-4342-B048-85BDC9FD1C3A}</a:tableStyleId>
               </a:tblPr>
               <a:tblGrid>
-                <a:gridCol w="2286000"/>
-                <a:gridCol w="2286000"/>
+                <a:gridCol w="2520000"/>
+                <a:gridCol w="1440000"/>
               </a:tblGrid>
-              <a:tr h="731520">
+              <a:tr h="540000">
                 <a:tc>
                   <a:txBody>
                     <a:bodyPr/>
                     <a:lstStyle/>
                     <a:p>
+                      <a:pPr>
+                        <a:defRPr sz="1800" b="1"/>
+                      </a:pPr>
                       <a:r>
                         <a:t>Categoría</a:t>
                       </a:r>
@@ -3274,6 +3277,9 @@
                     <a:bodyPr/>
                     <a:lstStyle/>
                     <a:p>
+                      <a:pPr>
+                        <a:defRPr sz="1800" b="1"/>
+                      </a:pPr>
                       <a:r>
                         <a:t>Total (€)</a:t>
                       </a:r>
@@ -3282,12 +3288,15 @@
                   <a:tcPr/>
                 </a:tc>
               </a:tr>
-              <a:tr h="731520">
+              <a:tr h="540000">
                 <a:tc>
                   <a:txBody>
                     <a:bodyPr/>
                     <a:lstStyle/>
                     <a:p>
+                      <a:pPr>
+                        <a:defRPr sz="1800" b="0"/>
+                      </a:pPr>
                       <a:r>
                         <a:t>Hogar</a:t>
                       </a:r>
@@ -3300,6 +3309,9 @@
                     <a:bodyPr/>
                     <a:lstStyle/>
                     <a:p>
+                      <a:pPr>
+                        <a:defRPr sz="1800" b="0"/>
+                      </a:pPr>
                       <a:r>
                         <a:t>29.800</a:t>
                       </a:r>
@@ -3308,12 +3320,15 @@
                   <a:tcPr/>
                 </a:tc>
               </a:tr>
-              <a:tr h="731520">
+              <a:tr h="540000">
                 <a:tc>
                   <a:txBody>
                     <a:bodyPr/>
                     <a:lstStyle/>
                     <a:p>
+                      <a:pPr>
+                        <a:defRPr sz="1800" b="0"/>
+                      </a:pPr>
                       <a:r>
                         <a:t>Textil</a:t>
                       </a:r>
@@ -3326,6 +3341,9 @@
                     <a:bodyPr/>
                     <a:lstStyle/>
                     <a:p>
+                      <a:pPr>
+                        <a:defRPr sz="1800" b="0"/>
+                      </a:pPr>
                       <a:r>
                         <a:t>18.700</a:t>
                       </a:r>
@@ -3334,12 +3352,15 @@
                   <a:tcPr/>
                 </a:tc>
               </a:tr>
-              <a:tr h="731520">
+              <a:tr h="540000">
                 <a:tc>
                   <a:txBody>
                     <a:bodyPr/>
                     <a:lstStyle/>
                     <a:p>
+                      <a:pPr>
+                        <a:defRPr sz="1800" b="0"/>
+                      </a:pPr>
                       <a:r>
                         <a:t>Bazar</a:t>
                       </a:r>
@@ -3352,6 +3373,9 @@
                     <a:bodyPr/>
                     <a:lstStyle/>
                     <a:p>
+                      <a:pPr>
+                        <a:defRPr sz="1800" b="0"/>
+                      </a:pPr>
                       <a:r>
                         <a:t>14.000</a:t>
                       </a:r>
@@ -3360,14 +3384,16 @@
                   <a:tcPr/>
                 </a:tc>
               </a:tr>
-              <a:tr h="731520">
+              <a:tr h="540000">
                 <a:tc>
                   <a:txBody>
                     <a:bodyPr/>
                     <a:lstStyle/>
                     <a:p>
+                      <a:pPr>
+                        <a:defRPr sz="1800" b="1"/>
+                      </a:pPr>
                       <a:r>
-                        <a:rPr b="1"/>
                         <a:t>TOTAL GENERAL</a:t>
                       </a:r>
                     </a:p>
@@ -3379,8 +3405,10 @@
                     <a:bodyPr/>
                     <a:lstStyle/>
                     <a:p>
+                      <a:pPr>
+                        <a:defRPr sz="1800" b="1"/>
+                      </a:pPr>
                       <a:r>
-                        <a:rPr b="1"/>
                         <a:t>62.500</a:t>
                       </a:r>
                     </a:p>
